--- a/tutorial/T12/tut12.pptx
+++ b/tutorial/T12/tut12.pptx
@@ -5404,7 +5404,7 @@
           </a:ln>
           <a:extLst>
             <a:ext uri="{C572A759-6A51-4108-AA02-DFA0A04FC94B}">
-              <ma14:wrappingTextBoxFlag xmlns="" xmlns:ma14="http://schemas.microsoft.com/office/mac/drawingml/2011/main" xmlns:a14="http://schemas.microsoft.com/office/drawing/2010/main" xmlns:m="http://schemas.openxmlformats.org/officeDocument/2006/math" val="1"/>
+              <ma14:wrappingTextBoxFlag xmlns:m="http://schemas.openxmlformats.org/officeDocument/2006/math" xmlns:a14="http://schemas.microsoft.com/office/drawing/2010/main" xmlns:ma14="http://schemas.microsoft.com/office/mac/drawingml/2011/main" xmlns="" val="1"/>
             </a:ext>
           </a:extLst>
         </p:spPr>
@@ -5443,7 +5443,7 @@
           </a:ln>
           <a:extLst>
             <a:ext uri="{C572A759-6A51-4108-AA02-DFA0A04FC94B}">
-              <ma14:wrappingTextBoxFlag xmlns="" xmlns:ma14="http://schemas.microsoft.com/office/mac/drawingml/2011/main" xmlns:a14="http://schemas.microsoft.com/office/drawing/2010/main" xmlns:m="http://schemas.openxmlformats.org/officeDocument/2006/math" val="1"/>
+              <ma14:wrappingTextBoxFlag xmlns:m="http://schemas.openxmlformats.org/officeDocument/2006/math" xmlns:a14="http://schemas.microsoft.com/office/drawing/2010/main" xmlns:ma14="http://schemas.microsoft.com/office/mac/drawingml/2011/main" xmlns="" val="1"/>
             </a:ext>
           </a:extLst>
         </p:spPr>
@@ -8985,7 +8985,7 @@
               <a:t>Apr</a:t>
             </a:r>
             <a:r>
-              <a:rPr kumimoji="0" lang="en-US" altLang="zh-CN" sz="2400" b="0" i="0" u="none" strike="noStrike" kern="0" cap="none" spc="0" normalizeH="0" baseline="0" noProof="0" dirty="0">
+              <a:rPr kumimoji="0" lang="en-US" altLang="zh-CN" sz="2400" b="0" i="0" u="none" strike="noStrike" kern="0" cap="none" spc="0" normalizeH="0" baseline="0" noProof="0">
                 <a:ln>
                   <a:noFill/>
                 </a:ln>
@@ -8999,14 +8999,17 @@
                 <a:cs typeface="Helvetica"/>
                 <a:sym typeface="Helvetica"/>
               </a:rPr>
-              <a:t> </a:t>
-            </a:r>
-            <a:r>
-              <a:rPr lang="en-US" altLang="zh-CN" sz="2400" dirty="0">
+              <a:t> 2</a:t>
+            </a:r>
+            <a:r>
+              <a:rPr lang="en-US" altLang="zh-CN" sz="2400">
                 <a:cs typeface="Helvetica"/>
               </a:rPr>
               <a:t>4</a:t>
             </a:r>
+            <a:endParaRPr lang="en-US" altLang="zh-CN" sz="2400" dirty="0">
+              <a:cs typeface="Helvetica"/>
+            </a:endParaRPr>
           </a:p>
           <a:p>
             <a:pPr marL="606425" lvl="1" indent="-288925">
